--- a/lab3_presentation.pptx
+++ b/lab3_presentation.pptx
@@ -116,6 +116,11 @@
       </a:defRPr>
     </a:lvl9pPr>
   </p:defaultTextStyle>
+  <p:extLst>
+    <p:ext uri="{EFAFB233-063F-42B5-8137-9DF3F51BA10A}">
+      <p15:sldGuideLst xmlns:p15="http://schemas.microsoft.com/office/powerpoint/2012/main"/>
+    </p:ext>
+  </p:extLst>
 </p:presentation>
 </file>
 
@@ -10115,15 +10120,16 @@
           </a:p>
           <a:p>
             <a:r>
-              <a:rPr lang="en-US" dirty="0"/>
-              <a:t>Handle multiple photos per issue</a:t>
-            </a:r>
-          </a:p>
-          <a:p>
-            <a:r>
               <a:rPr lang="en-US" noProof="0" dirty="0"/>
               <a:t>Picture analysis with existing knowledge from previous issues</a:t>
             </a:r>
+          </a:p>
+          <a:p>
+            <a:r>
+              <a:rPr lang="en-US" dirty="0"/>
+              <a:t>Use commercial reporting software</a:t>
+            </a:r>
+            <a:endParaRPr lang="en-US" noProof="0" dirty="0"/>
           </a:p>
         </p:txBody>
       </p:sp>

--- a/lab3_presentation.pptx
+++ b/lab3_presentation.pptx
@@ -9716,6 +9716,96 @@
           </p:txBody>
         </p:sp>
       </p:grpSp>
+      <p:grpSp>
+        <p:nvGrpSpPr>
+          <p:cNvPr id="4" name="Grupo 3">
+            <a:extLst>
+              <a:ext uri="{FF2B5EF4-FFF2-40B4-BE49-F238E27FC236}">
+                <a16:creationId xmlns:a16="http://schemas.microsoft.com/office/drawing/2014/main" id="{7F449FA3-BA8B-0598-BC4B-12013D804D9F}"/>
+              </a:ext>
+            </a:extLst>
+          </p:cNvPr>
+          <p:cNvGrpSpPr/>
+          <p:nvPr/>
+        </p:nvGrpSpPr>
+        <p:grpSpPr>
+          <a:xfrm>
+            <a:off x="3137569" y="2059825"/>
+            <a:ext cx="5916862" cy="2738352"/>
+            <a:chOff x="-2929999" y="2545588"/>
+            <a:chExt cx="4239006" cy="1961833"/>
+          </a:xfrm>
+          <a:effectLst>
+            <a:outerShdw blurRad="50800" dist="38100" dir="5400000" algn="t" rotWithShape="0">
+              <a:prstClr val="black">
+                <a:alpha val="40000"/>
+              </a:prstClr>
+            </a:outerShdw>
+          </a:effectLst>
+        </p:grpSpPr>
+        <p:pic>
+          <p:nvPicPr>
+            <p:cNvPr id="6" name="Imagen 5">
+              <a:extLst>
+                <a:ext uri="{FF2B5EF4-FFF2-40B4-BE49-F238E27FC236}">
+                  <a16:creationId xmlns:a16="http://schemas.microsoft.com/office/drawing/2014/main" id="{18625E8A-C830-F0B0-2259-D74948303D2B}"/>
+                </a:ext>
+              </a:extLst>
+            </p:cNvPr>
+            <p:cNvPicPr>
+              <a:picLocks noChangeAspect="1"/>
+            </p:cNvPicPr>
+            <p:nvPr/>
+          </p:nvPicPr>
+          <p:blipFill>
+            <a:blip r:embed="rId5"/>
+            <a:srcRect l="36030" t="51418" r="29200" b="27623"/>
+            <a:stretch>
+              <a:fillRect/>
+            </a:stretch>
+          </p:blipFill>
+          <p:spPr>
+            <a:xfrm>
+              <a:off x="-2929999" y="2545588"/>
+              <a:ext cx="4239006" cy="1325563"/>
+            </a:xfrm>
+            <a:prstGeom prst="rect">
+              <a:avLst/>
+            </a:prstGeom>
+          </p:spPr>
+        </p:pic>
+        <p:pic>
+          <p:nvPicPr>
+            <p:cNvPr id="3" name="Imagen 2">
+              <a:extLst>
+                <a:ext uri="{FF2B5EF4-FFF2-40B4-BE49-F238E27FC236}">
+                  <a16:creationId xmlns:a16="http://schemas.microsoft.com/office/drawing/2014/main" id="{34A176CC-C802-1F71-3603-352F1D079BC5}"/>
+                </a:ext>
+              </a:extLst>
+            </p:cNvPr>
+            <p:cNvPicPr>
+              <a:picLocks noChangeAspect="1"/>
+            </p:cNvPicPr>
+            <p:nvPr/>
+          </p:nvPicPr>
+          <p:blipFill>
+            <a:blip r:embed="rId6"/>
+            <a:srcRect l="36032" t="61807" r="29199" b="28133"/>
+            <a:stretch>
+              <a:fillRect/>
+            </a:stretch>
+          </p:blipFill>
+          <p:spPr>
+            <a:xfrm>
+              <a:off x="-2929999" y="3871151"/>
+              <a:ext cx="4239006" cy="636270"/>
+            </a:xfrm>
+            <a:prstGeom prst="rect">
+              <a:avLst/>
+            </a:prstGeom>
+          </p:spPr>
+        </p:pic>
+      </p:grpSp>
     </p:spTree>
     <p:extLst>
       <p:ext uri="{BB962C8B-B14F-4D97-AF65-F5344CB8AC3E}">
@@ -9851,6 +9941,51 @@
                                         </p:cTn>
                                         <p:tgtEl>
                                           <p:spTgt spid="24"/>
+                                        </p:tgtEl>
+                                        <p:attrNameLst>
+                                          <p:attrName>style.visibility</p:attrName>
+                                        </p:attrNameLst>
+                                      </p:cBhvr>
+                                      <p:to>
+                                        <p:strVal val="visible"/>
+                                      </p:to>
+                                    </p:set>
+                                  </p:childTnLst>
+                                </p:cTn>
+                              </p:par>
+                            </p:childTnLst>
+                          </p:cTn>
+                        </p:par>
+                      </p:childTnLst>
+                    </p:cTn>
+                  </p:par>
+                  <p:par>
+                    <p:cTn id="15" fill="hold">
+                      <p:stCondLst>
+                        <p:cond delay="indefinite"/>
+                      </p:stCondLst>
+                      <p:childTnLst>
+                        <p:par>
+                          <p:cTn id="16" fill="hold">
+                            <p:stCondLst>
+                              <p:cond delay="0"/>
+                            </p:stCondLst>
+                            <p:childTnLst>
+                              <p:par>
+                                <p:cTn id="17" presetID="1" presetClass="entr" presetSubtype="0" fill="hold" nodeType="clickEffect">
+                                  <p:stCondLst>
+                                    <p:cond delay="0"/>
+                                  </p:stCondLst>
+                                  <p:childTnLst>
+                                    <p:set>
+                                      <p:cBhvr>
+                                        <p:cTn id="18" dur="1" fill="hold">
+                                          <p:stCondLst>
+                                            <p:cond delay="0"/>
+                                          </p:stCondLst>
+                                        </p:cTn>
+                                        <p:tgtEl>
+                                          <p:spTgt spid="4"/>
                                         </p:tgtEl>
                                         <p:attrNameLst>
                                           <p:attrName>style.visibility</p:attrName>
